--- a/media/resources/files/ButunSandardyJanaOnduktardyKoboytuuBoluu-10-100-1000-JenilOrtoOor.pptx
+++ b/media/resources/files/ButunSandardyJanaOnduktardyKoboytuuBoluu-10-100-1000-JenilOrtoOor.pptx
@@ -2253,7 +2253,7 @@
           <a:p>
             <a:r>
               <a:rPr lang="en-GB" sz="2000" dirty="0"/>
-              <a:t>0.9 × 100</a:t>
+              <a:t>0,9 × 100</a:t>
             </a:r>
           </a:p>
         </p:txBody>
@@ -2442,7 +2442,7 @@
           <a:p>
             <a:r>
               <a:rPr lang="en-GB" sz="2000" dirty="0"/>
-              <a:t>2.7 × 100</a:t>
+              <a:t>2,7 × 100</a:t>
             </a:r>
           </a:p>
         </p:txBody>
@@ -2518,7 +2518,7 @@
           <a:p>
             <a:r>
               <a:rPr lang="en-GB" sz="2000" dirty="0"/>
-              <a:t>0.09 × 100</a:t>
+              <a:t>0,09 × 100</a:t>
             </a:r>
           </a:p>
         </p:txBody>
@@ -2594,7 +2594,7 @@
           <a:p>
             <a:r>
               <a:rPr lang="en-GB" sz="2000" dirty="0"/>
-              <a:t>4.07 × 1000</a:t>
+              <a:t>4,07 × 1000</a:t>
             </a:r>
           </a:p>
         </p:txBody>
@@ -2746,7 +2746,7 @@
           <a:p>
             <a:r>
               <a:rPr lang="en-GB" sz="2000" dirty="0"/>
-              <a:t>6.5 ÷ 1000</a:t>
+              <a:t>6,5 ÷ 1000</a:t>
             </a:r>
           </a:p>
         </p:txBody>
@@ -2898,7 +2898,7 @@
           <a:p>
             <a:r>
               <a:rPr lang="en-GB" sz="2000" dirty="0"/>
-              <a:t>0.0108 ÷ 10 × 1000</a:t>
+              <a:t>0,0108 ÷ 10 × 1000</a:t>
             </a:r>
           </a:p>
         </p:txBody>
@@ -3128,7 +3128,7 @@
           <a:p>
             <a:r>
               <a:rPr lang="en-GB" sz="2000" dirty="0"/>
-              <a:t>15.08 × 1000 =</a:t>
+              <a:t>15,08 × 1000 =</a:t>
             </a:r>
           </a:p>
         </p:txBody>
@@ -3204,7 +3204,7 @@
           <a:p>
             <a:r>
               <a:rPr lang="en-GB" sz="2000" dirty="0"/>
-              <a:t>65.03 ÷ 10000 =</a:t>
+              <a:t>65,03 ÷ 10000 =</a:t>
             </a:r>
           </a:p>
         </p:txBody>
@@ -3281,7 +3281,7 @@
             <a:pPr algn="ctr"/>
             <a:r>
               <a:rPr lang="ky-KG" sz="2000" dirty="0"/>
-              <a:t>4.03 миллионго </a:t>
+              <a:t>4,03 миллионго </a:t>
             </a:r>
           </a:p>
           <a:p>
@@ -4818,7 +4818,7 @@
           <a:p>
             <a:r>
               <a:rPr lang="en-GB" sz="2000" dirty="0"/>
-              <a:t>0.9 × 100</a:t>
+              <a:t>0,9 × 100</a:t>
             </a:r>
           </a:p>
         </p:txBody>
@@ -4980,7 +4980,7 @@
             <a:pPr algn="ctr"/>
             <a:r>
               <a:rPr lang="en-GB" sz="2000" dirty="0"/>
-              <a:t>1.5</a:t>
+              <a:t>1,5</a:t>
             </a:r>
           </a:p>
         </p:txBody>
@@ -5093,7 +5093,7 @@
           <a:p>
             <a:r>
               <a:rPr lang="en-GB" sz="2000" dirty="0"/>
-              <a:t>2.7 × 100</a:t>
+              <a:t>2,7 × 100</a:t>
             </a:r>
           </a:p>
         </p:txBody>
@@ -5212,7 +5212,7 @@
           <a:p>
             <a:r>
               <a:rPr lang="en-GB" sz="2000" dirty="0"/>
-              <a:t>0.09 × 100</a:t>
+              <a:t>0,09 × 100</a:t>
             </a:r>
           </a:p>
         </p:txBody>
@@ -5331,7 +5331,7 @@
           <a:p>
             <a:r>
               <a:rPr lang="en-GB" sz="2000" dirty="0"/>
-              <a:t>4.07 × 1000</a:t>
+              <a:t>4,07 × 1000</a:t>
             </a:r>
           </a:p>
         </p:txBody>
@@ -5493,7 +5493,7 @@
             <a:pPr algn="ctr"/>
             <a:r>
               <a:rPr lang="en-GB" sz="2000" dirty="0"/>
-              <a:t>1.78</a:t>
+              <a:t>1,78</a:t>
             </a:r>
           </a:p>
         </p:txBody>
@@ -5569,7 +5569,7 @@
           <a:p>
             <a:r>
               <a:rPr lang="en-GB" sz="2000" dirty="0"/>
-              <a:t>6.5 ÷ 1000</a:t>
+              <a:t>6,5 ÷ 1000</a:t>
             </a:r>
           </a:p>
         </p:txBody>
@@ -5612,7 +5612,7 @@
             <a:pPr algn="ctr"/>
             <a:r>
               <a:rPr lang="en-GB" sz="2000" dirty="0"/>
-              <a:t>0.0065</a:t>
+              <a:t>0,0065</a:t>
             </a:r>
           </a:p>
         </p:txBody>
@@ -5731,7 +5731,7 @@
             <a:pPr algn="ctr"/>
             <a:r>
               <a:rPr lang="en-GB" sz="2000" dirty="0"/>
-              <a:t>10.9</a:t>
+              <a:t>10,9</a:t>
             </a:r>
           </a:p>
         </p:txBody>
@@ -5807,7 +5807,7 @@
           <a:p>
             <a:r>
               <a:rPr lang="en-GB" sz="2000" dirty="0"/>
-              <a:t>0.0108 ÷ 10 × 1000</a:t>
+              <a:t>0,0108 ÷ 10 × 1000</a:t>
             </a:r>
           </a:p>
         </p:txBody>
@@ -5850,7 +5850,7 @@
             <a:pPr algn="ctr"/>
             <a:r>
               <a:rPr lang="en-GB" sz="2000" dirty="0"/>
-              <a:t>1.08</a:t>
+              <a:t>1,08</a:t>
             </a:r>
           </a:p>
         </p:txBody>
@@ -6088,7 +6088,7 @@
             <a:pPr algn="ctr"/>
             <a:r>
               <a:rPr lang="en-GB" sz="2000" dirty="0"/>
-              <a:t>0.003</a:t>
+              <a:t>0,003</a:t>
             </a:r>
           </a:p>
         </p:txBody>
@@ -6164,7 +6164,7 @@
           <a:p>
             <a:r>
               <a:rPr lang="en-GB" sz="2000" dirty="0"/>
-              <a:t>15.08 × 1000 =</a:t>
+              <a:t>15,08 × 1000 =</a:t>
             </a:r>
           </a:p>
         </p:txBody>
@@ -6283,7 +6283,7 @@
           <a:p>
             <a:r>
               <a:rPr lang="en-GB" sz="2000" dirty="0"/>
-              <a:t>65.03 ÷ 10000 =</a:t>
+              <a:t>65,03 ÷ 10000 =</a:t>
             </a:r>
           </a:p>
         </p:txBody>
@@ -6326,7 +6326,7 @@
             <a:pPr algn="ctr"/>
             <a:r>
               <a:rPr lang="en-GB" sz="2000" dirty="0"/>
-              <a:t>0.006503</a:t>
+              <a:t>0,006503</a:t>
             </a:r>
           </a:p>
         </p:txBody>
@@ -6535,7 +6535,7 @@
             <a:pPr algn="ctr"/>
             <a:r>
               <a:rPr lang="en-GB" sz="2000" dirty="0"/>
-              <a:t>0.84 kg</a:t>
+              <a:t>0,84 kg</a:t>
             </a:r>
           </a:p>
         </p:txBody>
@@ -6773,7 +6773,7 @@
             <a:pPr algn="ctr"/>
             <a:r>
               <a:rPr lang="ky-KG" sz="2000" dirty="0"/>
-              <a:t>4.03 миллионго </a:t>
+              <a:t>4,03 миллионго </a:t>
             </a:r>
           </a:p>
           <a:p>

--- a/media/resources/files/ButunSandardyJanaOnduktardyKoboytuuBoluu-10-100-1000-JenilOrtoOor.pptx
+++ b/media/resources/files/ButunSandardyJanaOnduktardyKoboytuuBoluu-10-100-1000-JenilOrtoOor.pptx
@@ -3204,7 +3204,7 @@
           <a:p>
             <a:r>
               <a:rPr lang="en-GB" sz="2000" dirty="0"/>
-              <a:t>65,03 ÷ 10000 =</a:t>
+              <a:t>65,03 ÷ 10 000 =</a:t>
             </a:r>
           </a:p>
         </p:txBody>
@@ -6283,7 +6283,7 @@
           <a:p>
             <a:r>
               <a:rPr lang="en-GB" sz="2000" dirty="0"/>
-              <a:t>65,03 ÷ 10000 =</a:t>
+              <a:t>65,03 ÷ 10 000 =</a:t>
             </a:r>
           </a:p>
         </p:txBody>
@@ -6326,7 +6326,7 @@
             <a:pPr algn="ctr"/>
             <a:r>
               <a:rPr lang="en-GB" sz="2000" dirty="0"/>
-              <a:t>0,006503</a:t>
+              <a:t>0,006 503</a:t>
             </a:r>
           </a:p>
         </p:txBody>
